--- a/public/documents/countries/bresil.pptx
+++ b/public/documents/countries/bresil.pptx
@@ -119,7 +119,7 @@
 </p:presentation>
 </file>
 
-<file path=ppt/charts/chart1.xml><?xml version="1.0" encoding="utf-8"?>
+<file path=ppt/charts/chart21.xml><?xml version="1.0" encoding="utf-8"?>
 <c:chartSpace xmlns:c="http://schemas.openxmlformats.org/drawingml/2006/chart" xmlns:a="http://schemas.openxmlformats.org/drawingml/2006/main" xmlns:r="http://schemas.openxmlformats.org/officeDocument/2006/relationships">
   <c:date1904 val="0"/>
   <c:roundedCorners val="1"/>
@@ -376,7 +376,7 @@
 </c:chartSpace>
 </file>
 
-<file path=ppt/charts/chart2.xml><?xml version="1.0" encoding="utf-8"?>
+<file path=ppt/charts/chart22.xml><?xml version="1.0" encoding="utf-8"?>
 <c:chartSpace xmlns:c="http://schemas.openxmlformats.org/drawingml/2006/chart" xmlns:a="http://schemas.openxmlformats.org/drawingml/2006/main" xmlns:r="http://schemas.openxmlformats.org/officeDocument/2006/relationships">
   <c:date1904 val="0"/>
   <c:roundedCorners val="1"/>
@@ -2593,7 +2593,7 @@
       </p:sp>
       <p:pic>
         <p:nvPicPr>
-          <p:cNvPr id="5" name="Image 1" descr="/workspace/scratch/634dfdc9a893/evergreen-countries/public/images/logo-icon.png">    </p:cNvPr>
+          <p:cNvPr id="5" name="Image 1" descr="/home/claude/green-solutions-web/public/images/logo-icon.png">    </p:cNvPr>
           <p:cNvPicPr>
             <a:picLocks noChangeAspect="1"/>
           </p:cNvPicPr>
@@ -2617,7 +2617,7 @@
       </p:pic>
       <p:pic>
         <p:nvPicPr>
-          <p:cNvPr id="6" name="Image 2" descr="/workspace/scratch/634dfdc9a893/evergreen-countries/scripts/dossiers/drapeaux/bresil.png">    </p:cNvPr>
+          <p:cNvPr id="6" name="Image 2" descr="/home/claude/green-solutions-web/scripts/dossiers/drapeaux/bresil.png">    </p:cNvPr>
           <p:cNvPicPr>
             <a:picLocks noChangeAspect="1"/>
           </p:cNvPicPr>
@@ -4558,7 +4558,7 @@
                 <a:ea typeface="Calibri" pitchFamily="34" charset="-122"/>
                 <a:cs typeface="Calibri" pitchFamily="34" charset="-120"/>
               </a:rPr>
-              <a:t>contact@evergreen-ecosorb.com · Green Solutions Groupe AIM SA, 46, route de la Condémine, 1475 Forel, Suisse</a:t>
+              <a:t>contact@green-solutions-group.com · Green Solutions Groupe AIM SA, 46, route de la Condémine, 1475 Forel, Suisse</a:t>
             </a:r>
             <a:endParaRPr lang="en-US" sz="1400" dirty="0"/>
           </a:p>
@@ -4566,7 +4566,7 @@
       </p:sp>
       <p:pic>
         <p:nvPicPr>
-          <p:cNvPr id="5" name="Image 0" descr="/workspace/scratch/634dfdc9a893/evergreen-countries/scripts/dossiers/sceau-aim-clair.png">    </p:cNvPr>
+          <p:cNvPr id="5" name="Image 0" descr="/home/claude/green-solutions-web/scripts/dossiers/sceau-aim-clair.png">    </p:cNvPr>
           <p:cNvPicPr>
             <a:picLocks noChangeAspect="1"/>
           </p:cNvPicPr>
